--- a/docs/pptx/carbo/ritu-carbo-linsubhr-egfrdisc-anemia3.pptx
+++ b/docs/pptx/carbo/ritu-carbo-linsubhr-egfrdisc-anemia3.pptx
@@ -2443,7 +2443,7 @@
           </p:nvSpPr>
           <p:spPr>
             <a:xfrm>
-              <a:off x="1810493" y="2073503"/>
+              <a:off x="1813815" y="2073503"/>
               <a:ext cx="0" cy="3649639"/>
             </a:xfrm>
             <a:custGeom>
@@ -2486,7 +2486,7 @@
           </p:nvSpPr>
           <p:spPr>
             <a:xfrm>
-              <a:off x="4291851" y="2073503"/>
+              <a:off x="4291714" y="2073503"/>
               <a:ext cx="0" cy="3649639"/>
             </a:xfrm>
             <a:custGeom>
@@ -2529,7 +2529,7 @@
           </p:nvSpPr>
           <p:spPr>
             <a:xfrm>
-              <a:off x="6773208" y="2073503"/>
+              <a:off x="6769614" y="2073503"/>
               <a:ext cx="0" cy="3649639"/>
             </a:xfrm>
             <a:custGeom>
@@ -2787,7 +2787,7 @@
           </p:nvSpPr>
           <p:spPr>
             <a:xfrm>
-              <a:off x="3051172" y="2073503"/>
+              <a:off x="3052764" y="2073503"/>
               <a:ext cx="0" cy="3649639"/>
             </a:xfrm>
             <a:custGeom>
@@ -2830,7 +2830,7 @@
           </p:nvSpPr>
           <p:spPr>
             <a:xfrm>
-              <a:off x="5532530" y="2073503"/>
+              <a:off x="5530664" y="2073503"/>
               <a:ext cx="0" cy="3649639"/>
             </a:xfrm>
             <a:custGeom>
@@ -2873,7 +2873,7 @@
           </p:nvSpPr>
           <p:spPr>
             <a:xfrm>
-              <a:off x="8013887" y="2073503"/>
+              <a:off x="8008563" y="2073503"/>
               <a:ext cx="0" cy="3649639"/>
             </a:xfrm>
             <a:custGeom>
@@ -2917,479 +2917,479 @@
           <p:spPr>
             <a:xfrm>
               <a:off x="1172049" y="2073503"/>
-              <a:ext cx="7090630" cy="3441273"/>
+              <a:ext cx="7090630" cy="3438432"/>
             </a:xfrm>
             <a:custGeom>
               <a:avLst/>
               <a:pathLst>
-                <a:path w="7090630" h="3441273">
+                <a:path w="7090630" h="3438432">
                   <a:moveTo>
-                    <a:pt x="3197471" y="0"/>
+                    <a:pt x="3198455" y="0"/>
                   </a:moveTo>
                   <a:lnTo>
-                    <a:pt x="3223013" y="101838"/>
-                  </a:lnTo>
-                  <a:lnTo>
-                    <a:pt x="3294636" y="365163"/>
-                  </a:lnTo>
-                  <a:lnTo>
-                    <a:pt x="3366258" y="607985"/>
-                  </a:lnTo>
-                  <a:lnTo>
-                    <a:pt x="3437881" y="831900"/>
-                  </a:lnTo>
-                  <a:lnTo>
-                    <a:pt x="3509503" y="1038381"/>
-                  </a:lnTo>
-                  <a:lnTo>
-                    <a:pt x="3581126" y="1228784"/>
-                  </a:lnTo>
-                  <a:lnTo>
-                    <a:pt x="3652748" y="1404362"/>
-                  </a:lnTo>
-                  <a:lnTo>
-                    <a:pt x="3724371" y="1566269"/>
-                  </a:lnTo>
-                  <a:lnTo>
-                    <a:pt x="3795993" y="1715569"/>
-                  </a:lnTo>
-                  <a:lnTo>
-                    <a:pt x="3867616" y="1853245"/>
-                  </a:lnTo>
-                  <a:lnTo>
-                    <a:pt x="3939238" y="1980200"/>
-                  </a:lnTo>
-                  <a:lnTo>
-                    <a:pt x="4010861" y="2097271"/>
-                  </a:lnTo>
-                  <a:lnTo>
-                    <a:pt x="4082483" y="2205226"/>
-                  </a:lnTo>
-                  <a:lnTo>
-                    <a:pt x="4154106" y="2304775"/>
-                  </a:lnTo>
-                  <a:lnTo>
-                    <a:pt x="4225729" y="2396573"/>
-                  </a:lnTo>
-                  <a:lnTo>
-                    <a:pt x="4297351" y="2481224"/>
-                  </a:lnTo>
-                  <a:lnTo>
-                    <a:pt x="4368974" y="2559283"/>
-                  </a:lnTo>
-                  <a:lnTo>
-                    <a:pt x="4440596" y="2631264"/>
-                  </a:lnTo>
-                  <a:lnTo>
-                    <a:pt x="4512219" y="2656899"/>
-                  </a:lnTo>
-                  <a:lnTo>
-                    <a:pt x="4583841" y="2660832"/>
-                  </a:lnTo>
-                  <a:lnTo>
-                    <a:pt x="4655464" y="2664747"/>
-                  </a:lnTo>
-                  <a:lnTo>
-                    <a:pt x="4727086" y="2668644"/>
-                  </a:lnTo>
-                  <a:lnTo>
-                    <a:pt x="4798709" y="2672521"/>
-                  </a:lnTo>
-                  <a:lnTo>
-                    <a:pt x="4870331" y="2676381"/>
-                  </a:lnTo>
-                  <a:lnTo>
-                    <a:pt x="4941954" y="2680222"/>
-                  </a:lnTo>
-                  <a:lnTo>
-                    <a:pt x="5013576" y="2684045"/>
-                  </a:lnTo>
-                  <a:lnTo>
-                    <a:pt x="5085199" y="2687849"/>
-                  </a:lnTo>
-                  <a:lnTo>
-                    <a:pt x="5156821" y="2691636"/>
-                  </a:lnTo>
-                  <a:lnTo>
-                    <a:pt x="5228444" y="2695404"/>
-                  </a:lnTo>
-                  <a:lnTo>
-                    <a:pt x="5300066" y="2699154"/>
-                  </a:lnTo>
-                  <a:lnTo>
-                    <a:pt x="5371689" y="2702887"/>
-                  </a:lnTo>
-                  <a:lnTo>
-                    <a:pt x="5443311" y="2706602"/>
-                  </a:lnTo>
-                  <a:lnTo>
-                    <a:pt x="5514934" y="2710299"/>
-                  </a:lnTo>
-                  <a:lnTo>
-                    <a:pt x="5586557" y="2713979"/>
-                  </a:lnTo>
-                  <a:lnTo>
-                    <a:pt x="5658179" y="2717641"/>
-                  </a:lnTo>
-                  <a:lnTo>
-                    <a:pt x="5729802" y="2721286"/>
-                  </a:lnTo>
-                  <a:lnTo>
-                    <a:pt x="5801424" y="2724913"/>
-                  </a:lnTo>
-                  <a:lnTo>
-                    <a:pt x="5873047" y="2728523"/>
-                  </a:lnTo>
-                  <a:lnTo>
-                    <a:pt x="5944669" y="2732116"/>
-                  </a:lnTo>
-                  <a:lnTo>
-                    <a:pt x="6016292" y="2735692"/>
-                  </a:lnTo>
-                  <a:lnTo>
-                    <a:pt x="6087914" y="2739251"/>
-                  </a:lnTo>
-                  <a:lnTo>
-                    <a:pt x="6159537" y="2742793"/>
-                  </a:lnTo>
-                  <a:lnTo>
-                    <a:pt x="6231159" y="2746318"/>
-                  </a:lnTo>
-                  <a:lnTo>
-                    <a:pt x="6302782" y="2749826"/>
-                  </a:lnTo>
-                  <a:lnTo>
-                    <a:pt x="6374404" y="2753318"/>
-                  </a:lnTo>
-                  <a:lnTo>
-                    <a:pt x="6446027" y="2756793"/>
-                  </a:lnTo>
-                  <a:lnTo>
-                    <a:pt x="6517649" y="2760251"/>
-                  </a:lnTo>
-                  <a:lnTo>
-                    <a:pt x="6589272" y="2763693"/>
-                  </a:lnTo>
-                  <a:lnTo>
-                    <a:pt x="6660894" y="2767119"/>
-                  </a:lnTo>
-                  <a:lnTo>
-                    <a:pt x="6732517" y="2770528"/>
-                  </a:lnTo>
-                  <a:lnTo>
-                    <a:pt x="6804139" y="2773921"/>
-                  </a:lnTo>
-                  <a:lnTo>
-                    <a:pt x="6875762" y="2777298"/>
-                  </a:lnTo>
-                  <a:lnTo>
-                    <a:pt x="6947385" y="2780659"/>
-                  </a:lnTo>
-                  <a:lnTo>
-                    <a:pt x="7019007" y="2784004"/>
-                  </a:lnTo>
-                  <a:lnTo>
-                    <a:pt x="7090630" y="2787333"/>
-                  </a:lnTo>
-                  <a:lnTo>
-                    <a:pt x="7090630" y="3441273"/>
-                  </a:lnTo>
-                  <a:lnTo>
-                    <a:pt x="7019007" y="3437687"/>
-                  </a:lnTo>
-                  <a:lnTo>
-                    <a:pt x="6947385" y="3433797"/>
-                  </a:lnTo>
-                  <a:lnTo>
-                    <a:pt x="6875762" y="3429580"/>
-                  </a:lnTo>
-                  <a:lnTo>
-                    <a:pt x="6804139" y="3425006"/>
-                  </a:lnTo>
-                  <a:lnTo>
-                    <a:pt x="6732517" y="3420046"/>
-                  </a:lnTo>
-                  <a:lnTo>
-                    <a:pt x="6660894" y="3414668"/>
-                  </a:lnTo>
-                  <a:lnTo>
-                    <a:pt x="6589272" y="3408835"/>
-                  </a:lnTo>
-                  <a:lnTo>
-                    <a:pt x="6517649" y="3402509"/>
-                  </a:lnTo>
-                  <a:lnTo>
-                    <a:pt x="6446027" y="3395650"/>
-                  </a:lnTo>
-                  <a:lnTo>
-                    <a:pt x="6374404" y="3388211"/>
-                  </a:lnTo>
-                  <a:lnTo>
-                    <a:pt x="6302782" y="3380144"/>
-                  </a:lnTo>
-                  <a:lnTo>
-                    <a:pt x="6231159" y="3371397"/>
-                  </a:lnTo>
-                  <a:lnTo>
-                    <a:pt x="6159537" y="3361910"/>
-                  </a:lnTo>
-                  <a:lnTo>
-                    <a:pt x="6087914" y="3351622"/>
-                  </a:lnTo>
-                  <a:lnTo>
-                    <a:pt x="6016292" y="3340466"/>
-                  </a:lnTo>
-                  <a:lnTo>
-                    <a:pt x="5944669" y="3328368"/>
-                  </a:lnTo>
-                  <a:lnTo>
-                    <a:pt x="5873047" y="3315248"/>
-                  </a:lnTo>
-                  <a:lnTo>
-                    <a:pt x="5801424" y="3301021"/>
-                  </a:lnTo>
-                  <a:lnTo>
-                    <a:pt x="5729802" y="3285592"/>
-                  </a:lnTo>
-                  <a:lnTo>
-                    <a:pt x="5658179" y="3268860"/>
-                  </a:lnTo>
-                  <a:lnTo>
-                    <a:pt x="5586557" y="3250716"/>
-                  </a:lnTo>
-                  <a:lnTo>
-                    <a:pt x="5514934" y="3231039"/>
-                  </a:lnTo>
-                  <a:lnTo>
-                    <a:pt x="5443311" y="3209701"/>
-                  </a:lnTo>
-                  <a:lnTo>
-                    <a:pt x="5371689" y="3186562"/>
-                  </a:lnTo>
-                  <a:lnTo>
-                    <a:pt x="5300066" y="3161468"/>
-                  </a:lnTo>
-                  <a:lnTo>
-                    <a:pt x="5228444" y="3134256"/>
-                  </a:lnTo>
-                  <a:lnTo>
-                    <a:pt x="5156821" y="3104746"/>
-                  </a:lnTo>
-                  <a:lnTo>
-                    <a:pt x="5085199" y="3072744"/>
-                  </a:lnTo>
-                  <a:lnTo>
-                    <a:pt x="5013576" y="3038040"/>
-                  </a:lnTo>
-                  <a:lnTo>
-                    <a:pt x="4941954" y="3000405"/>
-                  </a:lnTo>
-                  <a:lnTo>
-                    <a:pt x="4870331" y="2959593"/>
-                  </a:lnTo>
-                  <a:lnTo>
-                    <a:pt x="4798709" y="2915335"/>
-                  </a:lnTo>
-                  <a:lnTo>
-                    <a:pt x="4727086" y="2867340"/>
-                  </a:lnTo>
-                  <a:lnTo>
-                    <a:pt x="4655464" y="2815292"/>
-                  </a:lnTo>
-                  <a:lnTo>
-                    <a:pt x="4583841" y="2758850"/>
-                  </a:lnTo>
-                  <a:lnTo>
-                    <a:pt x="4512219" y="2697641"/>
-                  </a:lnTo>
-                  <a:lnTo>
-                    <a:pt x="4440596" y="2652946"/>
-                  </a:lnTo>
-                  <a:lnTo>
-                    <a:pt x="4368974" y="2648975"/>
-                  </a:lnTo>
-                  <a:lnTo>
-                    <a:pt x="4297351" y="2644984"/>
-                  </a:lnTo>
-                  <a:lnTo>
-                    <a:pt x="4225729" y="2640975"/>
-                  </a:lnTo>
-                  <a:lnTo>
-                    <a:pt x="4154106" y="2636946"/>
-                  </a:lnTo>
-                  <a:lnTo>
-                    <a:pt x="4082483" y="2632898"/>
-                  </a:lnTo>
-                  <a:lnTo>
-                    <a:pt x="4010861" y="2628831"/>
-                  </a:lnTo>
-                  <a:lnTo>
-                    <a:pt x="3939238" y="2624744"/>
-                  </a:lnTo>
-                  <a:lnTo>
-                    <a:pt x="3867616" y="2620638"/>
-                  </a:lnTo>
-                  <a:lnTo>
-                    <a:pt x="3795993" y="2616512"/>
-                  </a:lnTo>
-                  <a:lnTo>
-                    <a:pt x="3724371" y="2612367"/>
-                  </a:lnTo>
-                  <a:lnTo>
-                    <a:pt x="3652748" y="2608202"/>
-                  </a:lnTo>
-                  <a:lnTo>
-                    <a:pt x="3581126" y="2604016"/>
-                  </a:lnTo>
-                  <a:lnTo>
-                    <a:pt x="3509503" y="2599811"/>
-                  </a:lnTo>
-                  <a:lnTo>
-                    <a:pt x="3437881" y="2595586"/>
-                  </a:lnTo>
-                  <a:lnTo>
-                    <a:pt x="3366258" y="2591340"/>
-                  </a:lnTo>
-                  <a:lnTo>
-                    <a:pt x="3294636" y="2587074"/>
-                  </a:lnTo>
-                  <a:lnTo>
-                    <a:pt x="3223013" y="2582788"/>
-                  </a:lnTo>
-                  <a:lnTo>
-                    <a:pt x="3151391" y="2578481"/>
-                  </a:lnTo>
-                  <a:lnTo>
-                    <a:pt x="3079768" y="2574154"/>
-                  </a:lnTo>
-                  <a:lnTo>
-                    <a:pt x="3008146" y="2569806"/>
-                  </a:lnTo>
-                  <a:lnTo>
-                    <a:pt x="2936523" y="2565437"/>
-                  </a:lnTo>
-                  <a:lnTo>
-                    <a:pt x="2864901" y="2561047"/>
-                  </a:lnTo>
-                  <a:lnTo>
-                    <a:pt x="2793278" y="2556636"/>
-                  </a:lnTo>
-                  <a:lnTo>
-                    <a:pt x="2721655" y="2552205"/>
-                  </a:lnTo>
-                  <a:lnTo>
-                    <a:pt x="2650033" y="2547752"/>
-                  </a:lnTo>
-                  <a:lnTo>
-                    <a:pt x="2578410" y="2543277"/>
-                  </a:lnTo>
-                  <a:lnTo>
-                    <a:pt x="2506788" y="2538782"/>
-                  </a:lnTo>
-                  <a:lnTo>
-                    <a:pt x="2435165" y="2534265"/>
-                  </a:lnTo>
-                  <a:lnTo>
-                    <a:pt x="2363543" y="2529726"/>
-                  </a:lnTo>
-                  <a:lnTo>
-                    <a:pt x="2291920" y="2525166"/>
-                  </a:lnTo>
-                  <a:lnTo>
-                    <a:pt x="2220298" y="2520583"/>
-                  </a:lnTo>
-                  <a:lnTo>
-                    <a:pt x="2148675" y="2515979"/>
-                  </a:lnTo>
-                  <a:lnTo>
-                    <a:pt x="2077053" y="2511353"/>
-                  </a:lnTo>
-                  <a:lnTo>
-                    <a:pt x="2005430" y="2506705"/>
-                  </a:lnTo>
-                  <a:lnTo>
-                    <a:pt x="1933808" y="2502034"/>
-                  </a:lnTo>
-                  <a:lnTo>
-                    <a:pt x="1862185" y="2497342"/>
-                  </a:lnTo>
-                  <a:lnTo>
-                    <a:pt x="1790563" y="2492626"/>
-                  </a:lnTo>
-                  <a:lnTo>
-                    <a:pt x="1718940" y="2487889"/>
-                  </a:lnTo>
-                  <a:lnTo>
-                    <a:pt x="1647318" y="2483128"/>
-                  </a:lnTo>
-                  <a:lnTo>
-                    <a:pt x="1575695" y="2478345"/>
-                  </a:lnTo>
-                  <a:lnTo>
-                    <a:pt x="1504073" y="2473539"/>
-                  </a:lnTo>
-                  <a:lnTo>
-                    <a:pt x="1432450" y="2468710"/>
-                  </a:lnTo>
-                  <a:lnTo>
-                    <a:pt x="1360827" y="2463858"/>
-                  </a:lnTo>
-                  <a:lnTo>
-                    <a:pt x="1289205" y="2458983"/>
-                  </a:lnTo>
-                  <a:lnTo>
-                    <a:pt x="1217582" y="2454084"/>
-                  </a:lnTo>
-                  <a:lnTo>
-                    <a:pt x="1145960" y="2449162"/>
-                  </a:lnTo>
-                  <a:lnTo>
-                    <a:pt x="1074337" y="2444217"/>
-                  </a:lnTo>
-                  <a:lnTo>
-                    <a:pt x="1002715" y="2439248"/>
-                  </a:lnTo>
-                  <a:lnTo>
-                    <a:pt x="931092" y="2434255"/>
-                  </a:lnTo>
-                  <a:lnTo>
-                    <a:pt x="859470" y="2429238"/>
-                  </a:lnTo>
-                  <a:lnTo>
-                    <a:pt x="787847" y="2424197"/>
-                  </a:lnTo>
-                  <a:lnTo>
-                    <a:pt x="716225" y="2419132"/>
-                  </a:lnTo>
-                  <a:lnTo>
-                    <a:pt x="644602" y="2414043"/>
-                  </a:lnTo>
-                  <a:lnTo>
-                    <a:pt x="572980" y="2408930"/>
-                  </a:lnTo>
-                  <a:lnTo>
-                    <a:pt x="501357" y="2403792"/>
-                  </a:lnTo>
-                  <a:lnTo>
-                    <a:pt x="429735" y="2398629"/>
-                  </a:lnTo>
-                  <a:lnTo>
-                    <a:pt x="358112" y="2393442"/>
-                  </a:lnTo>
-                  <a:lnTo>
-                    <a:pt x="286490" y="2388231"/>
-                  </a:lnTo>
-                  <a:lnTo>
-                    <a:pt x="214867" y="2382994"/>
-                  </a:lnTo>
-                  <a:lnTo>
-                    <a:pt x="143245" y="2377732"/>
-                  </a:lnTo>
-                  <a:lnTo>
-                    <a:pt x="71622" y="2372445"/>
-                  </a:lnTo>
-                  <a:lnTo>
-                    <a:pt x="0" y="2367133"/>
+                    <a:pt x="3223013" y="96592"/>
+                  </a:lnTo>
+                  <a:lnTo>
+                    <a:pt x="3294636" y="356668"/>
+                  </a:lnTo>
+                  <a:lnTo>
+                    <a:pt x="3366258" y="596775"/>
+                  </a:lnTo>
+                  <a:lnTo>
+                    <a:pt x="3437881" y="818446"/>
+                  </a:lnTo>
+                  <a:lnTo>
+                    <a:pt x="3509503" y="1023096"/>
+                  </a:lnTo>
+                  <a:lnTo>
+                    <a:pt x="3581126" y="1212033"/>
+                  </a:lnTo>
+                  <a:lnTo>
+                    <a:pt x="3652748" y="1386462"/>
+                  </a:lnTo>
+                  <a:lnTo>
+                    <a:pt x="3724371" y="1547498"/>
+                  </a:lnTo>
+                  <a:lnTo>
+                    <a:pt x="3795993" y="1696169"/>
+                  </a:lnTo>
+                  <a:lnTo>
+                    <a:pt x="3867616" y="1833425"/>
+                  </a:lnTo>
+                  <a:lnTo>
+                    <a:pt x="3939238" y="1960142"/>
+                  </a:lnTo>
+                  <a:lnTo>
+                    <a:pt x="4010861" y="2077129"/>
+                  </a:lnTo>
+                  <a:lnTo>
+                    <a:pt x="4082483" y="2185134"/>
+                  </a:lnTo>
+                  <a:lnTo>
+                    <a:pt x="4154106" y="2284845"/>
+                  </a:lnTo>
+                  <a:lnTo>
+                    <a:pt x="4225729" y="2376901"/>
+                  </a:lnTo>
+                  <a:lnTo>
+                    <a:pt x="4297351" y="2461888"/>
+                  </a:lnTo>
+                  <a:lnTo>
+                    <a:pt x="4368974" y="2540349"/>
+                  </a:lnTo>
+                  <a:lnTo>
+                    <a:pt x="4440596" y="2612786"/>
+                  </a:lnTo>
+                  <a:lnTo>
+                    <a:pt x="4512219" y="2655503"/>
+                  </a:lnTo>
+                  <a:lnTo>
+                    <a:pt x="4583841" y="2658633"/>
+                  </a:lnTo>
+                  <a:lnTo>
+                    <a:pt x="4655464" y="2661750"/>
+                  </a:lnTo>
+                  <a:lnTo>
+                    <a:pt x="4727086" y="2664856"/>
+                  </a:lnTo>
+                  <a:lnTo>
+                    <a:pt x="4798709" y="2667950"/>
+                  </a:lnTo>
+                  <a:lnTo>
+                    <a:pt x="4870331" y="2671033"/>
+                  </a:lnTo>
+                  <a:lnTo>
+                    <a:pt x="4941954" y="2674103"/>
+                  </a:lnTo>
+                  <a:lnTo>
+                    <a:pt x="5013576" y="2677163"/>
+                  </a:lnTo>
+                  <a:lnTo>
+                    <a:pt x="5085199" y="2680210"/>
+                  </a:lnTo>
+                  <a:lnTo>
+                    <a:pt x="5156821" y="2683246"/>
+                  </a:lnTo>
+                  <a:lnTo>
+                    <a:pt x="5228444" y="2686271"/>
+                  </a:lnTo>
+                  <a:lnTo>
+                    <a:pt x="5300066" y="2689284"/>
+                  </a:lnTo>
+                  <a:lnTo>
+                    <a:pt x="5371689" y="2692286"/>
+                  </a:lnTo>
+                  <a:lnTo>
+                    <a:pt x="5443311" y="2695276"/>
+                  </a:lnTo>
+                  <a:lnTo>
+                    <a:pt x="5514934" y="2698256"/>
+                  </a:lnTo>
+                  <a:lnTo>
+                    <a:pt x="5586557" y="2701223"/>
+                  </a:lnTo>
+                  <a:lnTo>
+                    <a:pt x="5658179" y="2704180"/>
+                  </a:lnTo>
+                  <a:lnTo>
+                    <a:pt x="5729802" y="2707126"/>
+                  </a:lnTo>
+                  <a:lnTo>
+                    <a:pt x="5801424" y="2710060"/>
+                  </a:lnTo>
+                  <a:lnTo>
+                    <a:pt x="5873047" y="2712983"/>
+                  </a:lnTo>
+                  <a:lnTo>
+                    <a:pt x="5944669" y="2715896"/>
+                  </a:lnTo>
+                  <a:lnTo>
+                    <a:pt x="6016292" y="2718797"/>
+                  </a:lnTo>
+                  <a:lnTo>
+                    <a:pt x="6087914" y="2721687"/>
+                  </a:lnTo>
+                  <a:lnTo>
+                    <a:pt x="6159537" y="2724567"/>
+                  </a:lnTo>
+                  <a:lnTo>
+                    <a:pt x="6231159" y="2727435"/>
+                  </a:lnTo>
+                  <a:lnTo>
+                    <a:pt x="6302782" y="2730293"/>
+                  </a:lnTo>
+                  <a:lnTo>
+                    <a:pt x="6374404" y="2733140"/>
+                  </a:lnTo>
+                  <a:lnTo>
+                    <a:pt x="6446027" y="2735976"/>
+                  </a:lnTo>
+                  <a:lnTo>
+                    <a:pt x="6517649" y="2738801"/>
+                  </a:lnTo>
+                  <a:lnTo>
+                    <a:pt x="6589272" y="2741616"/>
+                  </a:lnTo>
+                  <a:lnTo>
+                    <a:pt x="6660894" y="2744420"/>
+                  </a:lnTo>
+                  <a:lnTo>
+                    <a:pt x="6732517" y="2747213"/>
+                  </a:lnTo>
+                  <a:lnTo>
+                    <a:pt x="6804139" y="2749996"/>
+                  </a:lnTo>
+                  <a:lnTo>
+                    <a:pt x="6875762" y="2752769"/>
+                  </a:lnTo>
+                  <a:lnTo>
+                    <a:pt x="6947385" y="2755531"/>
+                  </a:lnTo>
+                  <a:lnTo>
+                    <a:pt x="7019007" y="2758282"/>
+                  </a:lnTo>
+                  <a:lnTo>
+                    <a:pt x="7090630" y="2761023"/>
+                  </a:lnTo>
+                  <a:lnTo>
+                    <a:pt x="7090630" y="3438432"/>
+                  </a:lnTo>
+                  <a:lnTo>
+                    <a:pt x="7019007" y="3434663"/>
+                  </a:lnTo>
+                  <a:lnTo>
+                    <a:pt x="6947385" y="3430581"/>
+                  </a:lnTo>
+                  <a:lnTo>
+                    <a:pt x="6875762" y="3426159"/>
+                  </a:lnTo>
+                  <a:lnTo>
+                    <a:pt x="6804139" y="3421370"/>
+                  </a:lnTo>
+                  <a:lnTo>
+                    <a:pt x="6732517" y="3416182"/>
+                  </a:lnTo>
+                  <a:lnTo>
+                    <a:pt x="6660894" y="3410563"/>
+                  </a:lnTo>
+                  <a:lnTo>
+                    <a:pt x="6589272" y="3404476"/>
+                  </a:lnTo>
+                  <a:lnTo>
+                    <a:pt x="6517649" y="3397883"/>
+                  </a:lnTo>
+                  <a:lnTo>
+                    <a:pt x="6446027" y="3390742"/>
+                  </a:lnTo>
+                  <a:lnTo>
+                    <a:pt x="6374404" y="3383007"/>
+                  </a:lnTo>
+                  <a:lnTo>
+                    <a:pt x="6302782" y="3374629"/>
+                  </a:lnTo>
+                  <a:lnTo>
+                    <a:pt x="6231159" y="3365554"/>
+                  </a:lnTo>
+                  <a:lnTo>
+                    <a:pt x="6159537" y="3355724"/>
+                  </a:lnTo>
+                  <a:lnTo>
+                    <a:pt x="6087914" y="3345076"/>
+                  </a:lnTo>
+                  <a:lnTo>
+                    <a:pt x="6016292" y="3333543"/>
+                  </a:lnTo>
+                  <a:lnTo>
+                    <a:pt x="5944669" y="3321051"/>
+                  </a:lnTo>
+                  <a:lnTo>
+                    <a:pt x="5873047" y="3307519"/>
+                  </a:lnTo>
+                  <a:lnTo>
+                    <a:pt x="5801424" y="3292863"/>
+                  </a:lnTo>
+                  <a:lnTo>
+                    <a:pt x="5729802" y="3276987"/>
+                  </a:lnTo>
+                  <a:lnTo>
+                    <a:pt x="5658179" y="3259791"/>
+                  </a:lnTo>
+                  <a:lnTo>
+                    <a:pt x="5586557" y="3241165"/>
+                  </a:lnTo>
+                  <a:lnTo>
+                    <a:pt x="5514934" y="3220990"/>
+                  </a:lnTo>
+                  <a:lnTo>
+                    <a:pt x="5443311" y="3199136"/>
+                  </a:lnTo>
+                  <a:lnTo>
+                    <a:pt x="5371689" y="3175466"/>
+                  </a:lnTo>
+                  <a:lnTo>
+                    <a:pt x="5300066" y="3149826"/>
+                  </a:lnTo>
+                  <a:lnTo>
+                    <a:pt x="5228444" y="3122054"/>
+                  </a:lnTo>
+                  <a:lnTo>
+                    <a:pt x="5156821" y="3091973"/>
+                  </a:lnTo>
+                  <a:lnTo>
+                    <a:pt x="5085199" y="3059389"/>
+                  </a:lnTo>
+                  <a:lnTo>
+                    <a:pt x="5013576" y="3024096"/>
+                  </a:lnTo>
+                  <a:lnTo>
+                    <a:pt x="4941954" y="2985867"/>
+                  </a:lnTo>
+                  <a:lnTo>
+                    <a:pt x="4870331" y="2944459"/>
+                  </a:lnTo>
+                  <a:lnTo>
+                    <a:pt x="4798709" y="2899607"/>
+                  </a:lnTo>
+                  <a:lnTo>
+                    <a:pt x="4727086" y="2851024"/>
+                  </a:lnTo>
+                  <a:lnTo>
+                    <a:pt x="4655464" y="2798401"/>
+                  </a:lnTo>
+                  <a:lnTo>
+                    <a:pt x="4583841" y="2741402"/>
+                  </a:lnTo>
+                  <a:lnTo>
+                    <a:pt x="4512219" y="2679661"/>
+                  </a:lnTo>
+                  <a:lnTo>
+                    <a:pt x="4440596" y="2652362"/>
+                  </a:lnTo>
+                  <a:lnTo>
+                    <a:pt x="4368974" y="2649209"/>
+                  </a:lnTo>
+                  <a:lnTo>
+                    <a:pt x="4297351" y="2646044"/>
+                  </a:lnTo>
+                  <a:lnTo>
+                    <a:pt x="4225729" y="2642866"/>
+                  </a:lnTo>
+                  <a:lnTo>
+                    <a:pt x="4154106" y="2639677"/>
+                  </a:lnTo>
+                  <a:lnTo>
+                    <a:pt x="4082483" y="2636476"/>
+                  </a:lnTo>
+                  <a:lnTo>
+                    <a:pt x="4010861" y="2633262"/>
+                  </a:lnTo>
+                  <a:lnTo>
+                    <a:pt x="3939238" y="2630037"/>
+                  </a:lnTo>
+                  <a:lnTo>
+                    <a:pt x="3867616" y="2626799"/>
+                  </a:lnTo>
+                  <a:lnTo>
+                    <a:pt x="3795993" y="2623549"/>
+                  </a:lnTo>
+                  <a:lnTo>
+                    <a:pt x="3724371" y="2620286"/>
+                  </a:lnTo>
+                  <a:lnTo>
+                    <a:pt x="3652748" y="2617011"/>
+                  </a:lnTo>
+                  <a:lnTo>
+                    <a:pt x="3581126" y="2613724"/>
+                  </a:lnTo>
+                  <a:lnTo>
+                    <a:pt x="3509503" y="2610424"/>
+                  </a:lnTo>
+                  <a:lnTo>
+                    <a:pt x="3437881" y="2607112"/>
+                  </a:lnTo>
+                  <a:lnTo>
+                    <a:pt x="3366258" y="2603787"/>
+                  </a:lnTo>
+                  <a:lnTo>
+                    <a:pt x="3294636" y="2600450"/>
+                  </a:lnTo>
+                  <a:lnTo>
+                    <a:pt x="3223013" y="2597099"/>
+                  </a:lnTo>
+                  <a:lnTo>
+                    <a:pt x="3151391" y="2593737"/>
+                  </a:lnTo>
+                  <a:lnTo>
+                    <a:pt x="3079768" y="2590361"/>
+                  </a:lnTo>
+                  <a:lnTo>
+                    <a:pt x="3008146" y="2586973"/>
+                  </a:lnTo>
+                  <a:lnTo>
+                    <a:pt x="2936523" y="2583571"/>
+                  </a:lnTo>
+                  <a:lnTo>
+                    <a:pt x="2864901" y="2580157"/>
+                  </a:lnTo>
+                  <a:lnTo>
+                    <a:pt x="2793278" y="2576730"/>
+                  </a:lnTo>
+                  <a:lnTo>
+                    <a:pt x="2721655" y="2573290"/>
+                  </a:lnTo>
+                  <a:lnTo>
+                    <a:pt x="2650033" y="2569837"/>
+                  </a:lnTo>
+                  <a:lnTo>
+                    <a:pt x="2578410" y="2566371"/>
+                  </a:lnTo>
+                  <a:lnTo>
+                    <a:pt x="2506788" y="2562891"/>
+                  </a:lnTo>
+                  <a:lnTo>
+                    <a:pt x="2435165" y="2559399"/>
+                  </a:lnTo>
+                  <a:lnTo>
+                    <a:pt x="2363543" y="2555893"/>
+                  </a:lnTo>
+                  <a:lnTo>
+                    <a:pt x="2291920" y="2552374"/>
+                  </a:lnTo>
+                  <a:lnTo>
+                    <a:pt x="2220298" y="2548842"/>
+                  </a:lnTo>
+                  <a:lnTo>
+                    <a:pt x="2148675" y="2545296"/>
+                  </a:lnTo>
+                  <a:lnTo>
+                    <a:pt x="2077053" y="2541736"/>
+                  </a:lnTo>
+                  <a:lnTo>
+                    <a:pt x="2005430" y="2538164"/>
+                  </a:lnTo>
+                  <a:lnTo>
+                    <a:pt x="1933808" y="2534577"/>
+                  </a:lnTo>
+                  <a:lnTo>
+                    <a:pt x="1862185" y="2530977"/>
+                  </a:lnTo>
+                  <a:lnTo>
+                    <a:pt x="1790563" y="2527364"/>
+                  </a:lnTo>
+                  <a:lnTo>
+                    <a:pt x="1718940" y="2523736"/>
+                  </a:lnTo>
+                  <a:lnTo>
+                    <a:pt x="1647318" y="2520095"/>
+                  </a:lnTo>
+                  <a:lnTo>
+                    <a:pt x="1575695" y="2516440"/>
+                  </a:lnTo>
+                  <a:lnTo>
+                    <a:pt x="1504073" y="2512772"/>
+                  </a:lnTo>
+                  <a:lnTo>
+                    <a:pt x="1432450" y="2509089"/>
+                  </a:lnTo>
+                  <a:lnTo>
+                    <a:pt x="1360827" y="2505392"/>
+                  </a:lnTo>
+                  <a:lnTo>
+                    <a:pt x="1289205" y="2501682"/>
+                  </a:lnTo>
+                  <a:lnTo>
+                    <a:pt x="1217582" y="2497957"/>
+                  </a:lnTo>
+                  <a:lnTo>
+                    <a:pt x="1145960" y="2494218"/>
+                  </a:lnTo>
+                  <a:lnTo>
+                    <a:pt x="1074337" y="2490465"/>
+                  </a:lnTo>
+                  <a:lnTo>
+                    <a:pt x="1002715" y="2486698"/>
+                  </a:lnTo>
+                  <a:lnTo>
+                    <a:pt x="931092" y="2482916"/>
+                  </a:lnTo>
+                  <a:lnTo>
+                    <a:pt x="859470" y="2479120"/>
+                  </a:lnTo>
+                  <a:lnTo>
+                    <a:pt x="787847" y="2475310"/>
+                  </a:lnTo>
+                  <a:lnTo>
+                    <a:pt x="716225" y="2471485"/>
+                  </a:lnTo>
+                  <a:lnTo>
+                    <a:pt x="644602" y="2467646"/>
+                  </a:lnTo>
+                  <a:lnTo>
+                    <a:pt x="572980" y="2463792"/>
+                  </a:lnTo>
+                  <a:lnTo>
+                    <a:pt x="501357" y="2459924"/>
+                  </a:lnTo>
+                  <a:lnTo>
+                    <a:pt x="429735" y="2456041"/>
+                  </a:lnTo>
+                  <a:lnTo>
+                    <a:pt x="358112" y="2452143"/>
+                  </a:lnTo>
+                  <a:lnTo>
+                    <a:pt x="286490" y="2448230"/>
+                  </a:lnTo>
+                  <a:lnTo>
+                    <a:pt x="214867" y="2444303"/>
+                  </a:lnTo>
+                  <a:lnTo>
+                    <a:pt x="143245" y="2440361"/>
+                  </a:lnTo>
+                  <a:lnTo>
+                    <a:pt x="71622" y="2436403"/>
+                  </a:lnTo>
+                  <a:lnTo>
+                    <a:pt x="0" y="2432431"/>
                   </a:lnTo>
                   <a:lnTo>
                     <a:pt x="0" y="0"/>
@@ -3418,180 +3418,180 @@
           </p:nvSpPr>
           <p:spPr>
             <a:xfrm>
-              <a:off x="4369520" y="2073503"/>
-              <a:ext cx="3893158" cy="2787333"/>
+              <a:off x="4370504" y="2073503"/>
+              <a:ext cx="3892174" cy="2761023"/>
             </a:xfrm>
             <a:custGeom>
               <a:avLst/>
               <a:pathLst>
-                <a:path w="3893158" h="2787333">
+                <a:path w="3892174" h="2761023">
                   <a:moveTo>
                     <a:pt x="0" y="0"/>
                   </a:moveTo>
                   <a:lnTo>
-                    <a:pt x="25542" y="101838"/>
-                  </a:lnTo>
-                  <a:lnTo>
-                    <a:pt x="97165" y="365163"/>
-                  </a:lnTo>
-                  <a:lnTo>
-                    <a:pt x="168787" y="607985"/>
-                  </a:lnTo>
-                  <a:lnTo>
-                    <a:pt x="240410" y="831900"/>
-                  </a:lnTo>
-                  <a:lnTo>
-                    <a:pt x="312032" y="1038381"/>
-                  </a:lnTo>
-                  <a:lnTo>
-                    <a:pt x="383655" y="1228784"/>
-                  </a:lnTo>
-                  <a:lnTo>
-                    <a:pt x="455277" y="1404362"/>
-                  </a:lnTo>
-                  <a:lnTo>
-                    <a:pt x="526900" y="1566269"/>
-                  </a:lnTo>
-                  <a:lnTo>
-                    <a:pt x="598522" y="1715569"/>
-                  </a:lnTo>
-                  <a:lnTo>
-                    <a:pt x="670145" y="1853245"/>
-                  </a:lnTo>
-                  <a:lnTo>
-                    <a:pt x="741767" y="1980200"/>
-                  </a:lnTo>
-                  <a:lnTo>
-                    <a:pt x="813390" y="2097271"/>
-                  </a:lnTo>
-                  <a:lnTo>
-                    <a:pt x="885012" y="2205226"/>
-                  </a:lnTo>
-                  <a:lnTo>
-                    <a:pt x="956635" y="2304775"/>
-                  </a:lnTo>
-                  <a:lnTo>
-                    <a:pt x="1028257" y="2396573"/>
-                  </a:lnTo>
-                  <a:lnTo>
-                    <a:pt x="1099880" y="2481224"/>
-                  </a:lnTo>
-                  <a:lnTo>
-                    <a:pt x="1171502" y="2559283"/>
-                  </a:lnTo>
-                  <a:lnTo>
-                    <a:pt x="1243125" y="2631264"/>
-                  </a:lnTo>
-                  <a:lnTo>
-                    <a:pt x="1314748" y="2656899"/>
-                  </a:lnTo>
-                  <a:lnTo>
-                    <a:pt x="1386370" y="2660832"/>
-                  </a:lnTo>
-                  <a:lnTo>
-                    <a:pt x="1457993" y="2664747"/>
-                  </a:lnTo>
-                  <a:lnTo>
-                    <a:pt x="1529615" y="2668644"/>
-                  </a:lnTo>
-                  <a:lnTo>
-                    <a:pt x="1601238" y="2672521"/>
-                  </a:lnTo>
-                  <a:lnTo>
-                    <a:pt x="1672860" y="2676381"/>
-                  </a:lnTo>
-                  <a:lnTo>
-                    <a:pt x="1744483" y="2680222"/>
-                  </a:lnTo>
-                  <a:lnTo>
-                    <a:pt x="1816105" y="2684045"/>
-                  </a:lnTo>
-                  <a:lnTo>
-                    <a:pt x="1887728" y="2687849"/>
-                  </a:lnTo>
-                  <a:lnTo>
-                    <a:pt x="1959350" y="2691636"/>
-                  </a:lnTo>
-                  <a:lnTo>
-                    <a:pt x="2030973" y="2695404"/>
-                  </a:lnTo>
-                  <a:lnTo>
-                    <a:pt x="2102595" y="2699154"/>
-                  </a:lnTo>
-                  <a:lnTo>
-                    <a:pt x="2174218" y="2702887"/>
-                  </a:lnTo>
-                  <a:lnTo>
-                    <a:pt x="2245840" y="2706602"/>
-                  </a:lnTo>
-                  <a:lnTo>
-                    <a:pt x="2317463" y="2710299"/>
-                  </a:lnTo>
-                  <a:lnTo>
-                    <a:pt x="2389085" y="2713979"/>
-                  </a:lnTo>
-                  <a:lnTo>
-                    <a:pt x="2460708" y="2717641"/>
-                  </a:lnTo>
-                  <a:lnTo>
-                    <a:pt x="2532330" y="2721286"/>
-                  </a:lnTo>
-                  <a:lnTo>
-                    <a:pt x="2603953" y="2724913"/>
-                  </a:lnTo>
-                  <a:lnTo>
-                    <a:pt x="2675576" y="2728523"/>
-                  </a:lnTo>
-                  <a:lnTo>
-                    <a:pt x="2747198" y="2732116"/>
-                  </a:lnTo>
-                  <a:lnTo>
-                    <a:pt x="2818821" y="2735692"/>
-                  </a:lnTo>
-                  <a:lnTo>
-                    <a:pt x="2890443" y="2739251"/>
-                  </a:lnTo>
-                  <a:lnTo>
-                    <a:pt x="2962066" y="2742793"/>
-                  </a:lnTo>
-                  <a:lnTo>
-                    <a:pt x="3033688" y="2746318"/>
-                  </a:lnTo>
-                  <a:lnTo>
-                    <a:pt x="3105311" y="2749826"/>
-                  </a:lnTo>
-                  <a:lnTo>
-                    <a:pt x="3176933" y="2753318"/>
-                  </a:lnTo>
-                  <a:lnTo>
-                    <a:pt x="3248556" y="2756793"/>
-                  </a:lnTo>
-                  <a:lnTo>
-                    <a:pt x="3320178" y="2760251"/>
-                  </a:lnTo>
-                  <a:lnTo>
-                    <a:pt x="3391801" y="2763693"/>
-                  </a:lnTo>
-                  <a:lnTo>
-                    <a:pt x="3463423" y="2767119"/>
-                  </a:lnTo>
-                  <a:lnTo>
-                    <a:pt x="3535046" y="2770528"/>
-                  </a:lnTo>
-                  <a:lnTo>
-                    <a:pt x="3606668" y="2773921"/>
-                  </a:lnTo>
-                  <a:lnTo>
-                    <a:pt x="3678291" y="2777298"/>
-                  </a:lnTo>
-                  <a:lnTo>
-                    <a:pt x="3749913" y="2780659"/>
-                  </a:lnTo>
-                  <a:lnTo>
-                    <a:pt x="3821536" y="2784004"/>
-                  </a:lnTo>
-                  <a:lnTo>
-                    <a:pt x="3893158" y="2787333"/>
+                    <a:pt x="24558" y="96592"/>
+                  </a:lnTo>
+                  <a:lnTo>
+                    <a:pt x="96180" y="356668"/>
+                  </a:lnTo>
+                  <a:lnTo>
+                    <a:pt x="167803" y="596775"/>
+                  </a:lnTo>
+                  <a:lnTo>
+                    <a:pt x="239425" y="818446"/>
+                  </a:lnTo>
+                  <a:lnTo>
+                    <a:pt x="311048" y="1023096"/>
+                  </a:lnTo>
+                  <a:lnTo>
+                    <a:pt x="382670" y="1212033"/>
+                  </a:lnTo>
+                  <a:lnTo>
+                    <a:pt x="454293" y="1386462"/>
+                  </a:lnTo>
+                  <a:lnTo>
+                    <a:pt x="525915" y="1547498"/>
+                  </a:lnTo>
+                  <a:lnTo>
+                    <a:pt x="597538" y="1696169"/>
+                  </a:lnTo>
+                  <a:lnTo>
+                    <a:pt x="669160" y="1833425"/>
+                  </a:lnTo>
+                  <a:lnTo>
+                    <a:pt x="740783" y="1960142"/>
+                  </a:lnTo>
+                  <a:lnTo>
+                    <a:pt x="812405" y="2077129"/>
+                  </a:lnTo>
+                  <a:lnTo>
+                    <a:pt x="884028" y="2185134"/>
+                  </a:lnTo>
+                  <a:lnTo>
+                    <a:pt x="955650" y="2284845"/>
+                  </a:lnTo>
+                  <a:lnTo>
+                    <a:pt x="1027273" y="2376901"/>
+                  </a:lnTo>
+                  <a:lnTo>
+                    <a:pt x="1098895" y="2461888"/>
+                  </a:lnTo>
+                  <a:lnTo>
+                    <a:pt x="1170518" y="2540349"/>
+                  </a:lnTo>
+                  <a:lnTo>
+                    <a:pt x="1242141" y="2612786"/>
+                  </a:lnTo>
+                  <a:lnTo>
+                    <a:pt x="1313763" y="2655503"/>
+                  </a:lnTo>
+                  <a:lnTo>
+                    <a:pt x="1385386" y="2658633"/>
+                  </a:lnTo>
+                  <a:lnTo>
+                    <a:pt x="1457008" y="2661750"/>
+                  </a:lnTo>
+                  <a:lnTo>
+                    <a:pt x="1528631" y="2664856"/>
+                  </a:lnTo>
+                  <a:lnTo>
+                    <a:pt x="1600253" y="2667950"/>
+                  </a:lnTo>
+                  <a:lnTo>
+                    <a:pt x="1671876" y="2671033"/>
+                  </a:lnTo>
+                  <a:lnTo>
+                    <a:pt x="1743498" y="2674103"/>
+                  </a:lnTo>
+                  <a:lnTo>
+                    <a:pt x="1815121" y="2677163"/>
+                  </a:lnTo>
+                  <a:lnTo>
+                    <a:pt x="1886743" y="2680210"/>
+                  </a:lnTo>
+                  <a:lnTo>
+                    <a:pt x="1958366" y="2683246"/>
+                  </a:lnTo>
+                  <a:lnTo>
+                    <a:pt x="2029988" y="2686271"/>
+                  </a:lnTo>
+                  <a:lnTo>
+                    <a:pt x="2101611" y="2689284"/>
+                  </a:lnTo>
+                  <a:lnTo>
+                    <a:pt x="2173233" y="2692286"/>
+                  </a:lnTo>
+                  <a:lnTo>
+                    <a:pt x="2244856" y="2695276"/>
+                  </a:lnTo>
+                  <a:lnTo>
+                    <a:pt x="2316478" y="2698256"/>
+                  </a:lnTo>
+                  <a:lnTo>
+                    <a:pt x="2388101" y="2701223"/>
+                  </a:lnTo>
+                  <a:lnTo>
+                    <a:pt x="2459723" y="2704180"/>
+                  </a:lnTo>
+                  <a:lnTo>
+                    <a:pt x="2531346" y="2707126"/>
+                  </a:lnTo>
+                  <a:lnTo>
+                    <a:pt x="2602969" y="2710060"/>
+                  </a:lnTo>
+                  <a:lnTo>
+                    <a:pt x="2674591" y="2712983"/>
+                  </a:lnTo>
+                  <a:lnTo>
+                    <a:pt x="2746214" y="2715896"/>
+                  </a:lnTo>
+                  <a:lnTo>
+                    <a:pt x="2817836" y="2718797"/>
+                  </a:lnTo>
+                  <a:lnTo>
+                    <a:pt x="2889459" y="2721687"/>
+                  </a:lnTo>
+                  <a:lnTo>
+                    <a:pt x="2961081" y="2724567"/>
+                  </a:lnTo>
+                  <a:lnTo>
+                    <a:pt x="3032704" y="2727435"/>
+                  </a:lnTo>
+                  <a:lnTo>
+                    <a:pt x="3104326" y="2730293"/>
+                  </a:lnTo>
+                  <a:lnTo>
+                    <a:pt x="3175949" y="2733140"/>
+                  </a:lnTo>
+                  <a:lnTo>
+                    <a:pt x="3247571" y="2735976"/>
+                  </a:lnTo>
+                  <a:lnTo>
+                    <a:pt x="3319194" y="2738801"/>
+                  </a:lnTo>
+                  <a:lnTo>
+                    <a:pt x="3390816" y="2741616"/>
+                  </a:lnTo>
+                  <a:lnTo>
+                    <a:pt x="3462439" y="2744420"/>
+                  </a:lnTo>
+                  <a:lnTo>
+                    <a:pt x="3534061" y="2747213"/>
+                  </a:lnTo>
+                  <a:lnTo>
+                    <a:pt x="3605684" y="2749996"/>
+                  </a:lnTo>
+                  <a:lnTo>
+                    <a:pt x="3677306" y="2752769"/>
+                  </a:lnTo>
+                  <a:lnTo>
+                    <a:pt x="3748929" y="2755531"/>
+                  </a:lnTo>
+                  <a:lnTo>
+                    <a:pt x="3820551" y="2758282"/>
+                  </a:lnTo>
+                  <a:lnTo>
+                    <a:pt x="3892174" y="2761023"/>
                   </a:lnTo>
                 </a:path>
               </a:pathLst>
@@ -3611,309 +3611,309 @@
           </p:nvSpPr>
           <p:spPr>
             <a:xfrm>
-              <a:off x="1172049" y="4440636"/>
-              <a:ext cx="7090630" cy="1074140"/>
+              <a:off x="1172049" y="4505934"/>
+              <a:ext cx="7090630" cy="1006000"/>
             </a:xfrm>
             <a:custGeom>
               <a:avLst/>
               <a:pathLst>
-                <a:path w="7090630" h="1074140">
+                <a:path w="7090630" h="1006000">
                   <a:moveTo>
-                    <a:pt x="7090630" y="1074140"/>
+                    <a:pt x="7090630" y="1006000"/>
                   </a:moveTo>
                   <a:lnTo>
-                    <a:pt x="7019007" y="1070553"/>
-                  </a:lnTo>
-                  <a:lnTo>
-                    <a:pt x="6947385" y="1066664"/>
-                  </a:lnTo>
-                  <a:lnTo>
-                    <a:pt x="6875762" y="1062447"/>
-                  </a:lnTo>
-                  <a:lnTo>
-                    <a:pt x="6804139" y="1057873"/>
-                  </a:lnTo>
-                  <a:lnTo>
-                    <a:pt x="6732517" y="1052913"/>
-                  </a:lnTo>
-                  <a:lnTo>
-                    <a:pt x="6660894" y="1047534"/>
-                  </a:lnTo>
-                  <a:lnTo>
-                    <a:pt x="6589272" y="1041701"/>
-                  </a:lnTo>
-                  <a:lnTo>
-                    <a:pt x="6517649" y="1035376"/>
-                  </a:lnTo>
-                  <a:lnTo>
-                    <a:pt x="6446027" y="1028517"/>
-                  </a:lnTo>
-                  <a:lnTo>
-                    <a:pt x="6374404" y="1021078"/>
-                  </a:lnTo>
-                  <a:lnTo>
-                    <a:pt x="6302782" y="1013011"/>
-                  </a:lnTo>
-                  <a:lnTo>
-                    <a:pt x="6231159" y="1004263"/>
-                  </a:lnTo>
-                  <a:lnTo>
-                    <a:pt x="6159537" y="994777"/>
-                  </a:lnTo>
-                  <a:lnTo>
-                    <a:pt x="6087914" y="984489"/>
-                  </a:lnTo>
-                  <a:lnTo>
-                    <a:pt x="6016292" y="973333"/>
-                  </a:lnTo>
-                  <a:lnTo>
-                    <a:pt x="5944669" y="961235"/>
-                  </a:lnTo>
-                  <a:lnTo>
-                    <a:pt x="5873047" y="948115"/>
-                  </a:lnTo>
-                  <a:lnTo>
-                    <a:pt x="5801424" y="933888"/>
-                  </a:lnTo>
-                  <a:lnTo>
-                    <a:pt x="5729802" y="918459"/>
-                  </a:lnTo>
-                  <a:lnTo>
-                    <a:pt x="5658179" y="901727"/>
-                  </a:lnTo>
-                  <a:lnTo>
-                    <a:pt x="5586557" y="883583"/>
-                  </a:lnTo>
-                  <a:lnTo>
-                    <a:pt x="5514934" y="863906"/>
-                  </a:lnTo>
-                  <a:lnTo>
-                    <a:pt x="5443311" y="842568"/>
-                  </a:lnTo>
-                  <a:lnTo>
-                    <a:pt x="5371689" y="819428"/>
-                  </a:lnTo>
-                  <a:lnTo>
-                    <a:pt x="5300066" y="794335"/>
-                  </a:lnTo>
-                  <a:lnTo>
-                    <a:pt x="5228444" y="767122"/>
-                  </a:lnTo>
-                  <a:lnTo>
-                    <a:pt x="5156821" y="737612"/>
-                  </a:lnTo>
-                  <a:lnTo>
-                    <a:pt x="5085199" y="705611"/>
-                  </a:lnTo>
-                  <a:lnTo>
-                    <a:pt x="5013576" y="670907"/>
-                  </a:lnTo>
-                  <a:lnTo>
-                    <a:pt x="4941954" y="633272"/>
-                  </a:lnTo>
-                  <a:lnTo>
-                    <a:pt x="4870331" y="592460"/>
-                  </a:lnTo>
-                  <a:lnTo>
-                    <a:pt x="4798709" y="548202"/>
-                  </a:lnTo>
-                  <a:lnTo>
-                    <a:pt x="4727086" y="500207"/>
-                  </a:lnTo>
-                  <a:lnTo>
-                    <a:pt x="4655464" y="448159"/>
-                  </a:lnTo>
-                  <a:lnTo>
-                    <a:pt x="4583841" y="391716"/>
-                  </a:lnTo>
-                  <a:lnTo>
-                    <a:pt x="4512219" y="330508"/>
-                  </a:lnTo>
-                  <a:lnTo>
-                    <a:pt x="4440596" y="285813"/>
-                  </a:lnTo>
-                  <a:lnTo>
-                    <a:pt x="4368974" y="281841"/>
-                  </a:lnTo>
-                  <a:lnTo>
-                    <a:pt x="4297351" y="277851"/>
-                  </a:lnTo>
-                  <a:lnTo>
-                    <a:pt x="4225729" y="273842"/>
-                  </a:lnTo>
-                  <a:lnTo>
-                    <a:pt x="4154106" y="269813"/>
-                  </a:lnTo>
-                  <a:lnTo>
-                    <a:pt x="4082483" y="265765"/>
-                  </a:lnTo>
-                  <a:lnTo>
-                    <a:pt x="4010861" y="261698"/>
-                  </a:lnTo>
-                  <a:lnTo>
-                    <a:pt x="3939238" y="257611"/>
-                  </a:lnTo>
-                  <a:lnTo>
-                    <a:pt x="3867616" y="253505"/>
-                  </a:lnTo>
-                  <a:lnTo>
-                    <a:pt x="3795993" y="249379"/>
-                  </a:lnTo>
-                  <a:lnTo>
-                    <a:pt x="3724371" y="245234"/>
-                  </a:lnTo>
-                  <a:lnTo>
-                    <a:pt x="3652748" y="241068"/>
-                  </a:lnTo>
-                  <a:lnTo>
-                    <a:pt x="3581126" y="236883"/>
-                  </a:lnTo>
-                  <a:lnTo>
-                    <a:pt x="3509503" y="232678"/>
-                  </a:lnTo>
-                  <a:lnTo>
-                    <a:pt x="3437881" y="228452"/>
-                  </a:lnTo>
-                  <a:lnTo>
-                    <a:pt x="3366258" y="224207"/>
-                  </a:lnTo>
-                  <a:lnTo>
-                    <a:pt x="3294636" y="219941"/>
-                  </a:lnTo>
-                  <a:lnTo>
-                    <a:pt x="3223013" y="215655"/>
-                  </a:lnTo>
-                  <a:lnTo>
-                    <a:pt x="3151391" y="211348"/>
-                  </a:lnTo>
-                  <a:lnTo>
-                    <a:pt x="3079768" y="207020"/>
-                  </a:lnTo>
-                  <a:lnTo>
-                    <a:pt x="3008146" y="202672"/>
-                  </a:lnTo>
-                  <a:lnTo>
-                    <a:pt x="2936523" y="198304"/>
-                  </a:lnTo>
-                  <a:lnTo>
-                    <a:pt x="2864901" y="193914"/>
-                  </a:lnTo>
-                  <a:lnTo>
-                    <a:pt x="2793278" y="189503"/>
-                  </a:lnTo>
-                  <a:lnTo>
-                    <a:pt x="2721655" y="185071"/>
-                  </a:lnTo>
-                  <a:lnTo>
-                    <a:pt x="2650033" y="180618"/>
-                  </a:lnTo>
-                  <a:lnTo>
-                    <a:pt x="2578410" y="176144"/>
-                  </a:lnTo>
-                  <a:lnTo>
-                    <a:pt x="2506788" y="171649"/>
-                  </a:lnTo>
-                  <a:lnTo>
-                    <a:pt x="2435165" y="167131"/>
-                  </a:lnTo>
-                  <a:lnTo>
-                    <a:pt x="2363543" y="162593"/>
-                  </a:lnTo>
-                  <a:lnTo>
-                    <a:pt x="2291920" y="158032"/>
-                  </a:lnTo>
-                  <a:lnTo>
-                    <a:pt x="2220298" y="153450"/>
-                  </a:lnTo>
-                  <a:lnTo>
-                    <a:pt x="2148675" y="148846"/>
-                  </a:lnTo>
-                  <a:lnTo>
-                    <a:pt x="2077053" y="144220"/>
-                  </a:lnTo>
-                  <a:lnTo>
-                    <a:pt x="2005430" y="139572"/>
-                  </a:lnTo>
-                  <a:lnTo>
-                    <a:pt x="1933808" y="134901"/>
-                  </a:lnTo>
-                  <a:lnTo>
-                    <a:pt x="1862185" y="130208"/>
-                  </a:lnTo>
-                  <a:lnTo>
-                    <a:pt x="1790563" y="125493"/>
-                  </a:lnTo>
-                  <a:lnTo>
-                    <a:pt x="1718940" y="120755"/>
-                  </a:lnTo>
-                  <a:lnTo>
-                    <a:pt x="1647318" y="115995"/>
-                  </a:lnTo>
-                  <a:lnTo>
-                    <a:pt x="1575695" y="111212"/>
-                  </a:lnTo>
-                  <a:lnTo>
-                    <a:pt x="1504073" y="106406"/>
-                  </a:lnTo>
-                  <a:lnTo>
-                    <a:pt x="1432450" y="101577"/>
-                  </a:lnTo>
-                  <a:lnTo>
-                    <a:pt x="1360827" y="96725"/>
-                  </a:lnTo>
-                  <a:lnTo>
-                    <a:pt x="1289205" y="91850"/>
-                  </a:lnTo>
-                  <a:lnTo>
-                    <a:pt x="1217582" y="86951"/>
-                  </a:lnTo>
-                  <a:lnTo>
-                    <a:pt x="1145960" y="82029"/>
-                  </a:lnTo>
-                  <a:lnTo>
-                    <a:pt x="1074337" y="77083"/>
-                  </a:lnTo>
-                  <a:lnTo>
-                    <a:pt x="1002715" y="72114"/>
-                  </a:lnTo>
-                  <a:lnTo>
-                    <a:pt x="931092" y="67121"/>
-                  </a:lnTo>
-                  <a:lnTo>
-                    <a:pt x="859470" y="62105"/>
-                  </a:lnTo>
-                  <a:lnTo>
-                    <a:pt x="787847" y="57064"/>
-                  </a:lnTo>
-                  <a:lnTo>
-                    <a:pt x="716225" y="51999"/>
-                  </a:lnTo>
-                  <a:lnTo>
-                    <a:pt x="644602" y="46910"/>
-                  </a:lnTo>
-                  <a:lnTo>
-                    <a:pt x="572980" y="41797"/>
-                  </a:lnTo>
-                  <a:lnTo>
-                    <a:pt x="501357" y="36659"/>
-                  </a:lnTo>
-                  <a:lnTo>
-                    <a:pt x="429735" y="31496"/>
-                  </a:lnTo>
-                  <a:lnTo>
-                    <a:pt x="358112" y="26309"/>
-                  </a:lnTo>
-                  <a:lnTo>
-                    <a:pt x="286490" y="21097"/>
-                  </a:lnTo>
-                  <a:lnTo>
-                    <a:pt x="214867" y="15861"/>
-                  </a:lnTo>
-                  <a:lnTo>
-                    <a:pt x="143245" y="10599"/>
-                  </a:lnTo>
-                  <a:lnTo>
-                    <a:pt x="71622" y="5312"/>
+                    <a:pt x="7019007" y="1002232"/>
+                  </a:lnTo>
+                  <a:lnTo>
+                    <a:pt x="6947385" y="998149"/>
+                  </a:lnTo>
+                  <a:lnTo>
+                    <a:pt x="6875762" y="993728"/>
+                  </a:lnTo>
+                  <a:lnTo>
+                    <a:pt x="6804139" y="988938"/>
+                  </a:lnTo>
+                  <a:lnTo>
+                    <a:pt x="6732517" y="983751"/>
+                  </a:lnTo>
+                  <a:lnTo>
+                    <a:pt x="6660894" y="978131"/>
+                  </a:lnTo>
+                  <a:lnTo>
+                    <a:pt x="6589272" y="972045"/>
+                  </a:lnTo>
+                  <a:lnTo>
+                    <a:pt x="6517649" y="965452"/>
+                  </a:lnTo>
+                  <a:lnTo>
+                    <a:pt x="6446027" y="958311"/>
+                  </a:lnTo>
+                  <a:lnTo>
+                    <a:pt x="6374404" y="950576"/>
+                  </a:lnTo>
+                  <a:lnTo>
+                    <a:pt x="6302782" y="942197"/>
+                  </a:lnTo>
+                  <a:lnTo>
+                    <a:pt x="6231159" y="933122"/>
+                  </a:lnTo>
+                  <a:lnTo>
+                    <a:pt x="6159537" y="923292"/>
+                  </a:lnTo>
+                  <a:lnTo>
+                    <a:pt x="6087914" y="912644"/>
+                  </a:lnTo>
+                  <a:lnTo>
+                    <a:pt x="6016292" y="901111"/>
+                  </a:lnTo>
+                  <a:lnTo>
+                    <a:pt x="5944669" y="888619"/>
+                  </a:lnTo>
+                  <a:lnTo>
+                    <a:pt x="5873047" y="875088"/>
+                  </a:lnTo>
+                  <a:lnTo>
+                    <a:pt x="5801424" y="860431"/>
+                  </a:lnTo>
+                  <a:lnTo>
+                    <a:pt x="5729802" y="844555"/>
+                  </a:lnTo>
+                  <a:lnTo>
+                    <a:pt x="5658179" y="827359"/>
+                  </a:lnTo>
+                  <a:lnTo>
+                    <a:pt x="5586557" y="808733"/>
+                  </a:lnTo>
+                  <a:lnTo>
+                    <a:pt x="5514934" y="788558"/>
+                  </a:lnTo>
+                  <a:lnTo>
+                    <a:pt x="5443311" y="766705"/>
+                  </a:lnTo>
+                  <a:lnTo>
+                    <a:pt x="5371689" y="743034"/>
+                  </a:lnTo>
+                  <a:lnTo>
+                    <a:pt x="5300066" y="717395"/>
+                  </a:lnTo>
+                  <a:lnTo>
+                    <a:pt x="5228444" y="689623"/>
+                  </a:lnTo>
+                  <a:lnTo>
+                    <a:pt x="5156821" y="659541"/>
+                  </a:lnTo>
+                  <a:lnTo>
+                    <a:pt x="5085199" y="626958"/>
+                  </a:lnTo>
+                  <a:lnTo>
+                    <a:pt x="5013576" y="591664"/>
+                  </a:lnTo>
+                  <a:lnTo>
+                    <a:pt x="4941954" y="553435"/>
+                  </a:lnTo>
+                  <a:lnTo>
+                    <a:pt x="4870331" y="512027"/>
+                  </a:lnTo>
+                  <a:lnTo>
+                    <a:pt x="4798709" y="467175"/>
+                  </a:lnTo>
+                  <a:lnTo>
+                    <a:pt x="4727086" y="418593"/>
+                  </a:lnTo>
+                  <a:lnTo>
+                    <a:pt x="4655464" y="365970"/>
+                  </a:lnTo>
+                  <a:lnTo>
+                    <a:pt x="4583841" y="308970"/>
+                  </a:lnTo>
+                  <a:lnTo>
+                    <a:pt x="4512219" y="247230"/>
+                  </a:lnTo>
+                  <a:lnTo>
+                    <a:pt x="4440596" y="219930"/>
+                  </a:lnTo>
+                  <a:lnTo>
+                    <a:pt x="4368974" y="216777"/>
+                  </a:lnTo>
+                  <a:lnTo>
+                    <a:pt x="4297351" y="213612"/>
+                  </a:lnTo>
+                  <a:lnTo>
+                    <a:pt x="4225729" y="210435"/>
+                  </a:lnTo>
+                  <a:lnTo>
+                    <a:pt x="4154106" y="207246"/>
+                  </a:lnTo>
+                  <a:lnTo>
+                    <a:pt x="4082483" y="204044"/>
+                  </a:lnTo>
+                  <a:lnTo>
+                    <a:pt x="4010861" y="200831"/>
+                  </a:lnTo>
+                  <a:lnTo>
+                    <a:pt x="3939238" y="197605"/>
+                  </a:lnTo>
+                  <a:lnTo>
+                    <a:pt x="3867616" y="194367"/>
+                  </a:lnTo>
+                  <a:lnTo>
+                    <a:pt x="3795993" y="191117"/>
+                  </a:lnTo>
+                  <a:lnTo>
+                    <a:pt x="3724371" y="187854"/>
+                  </a:lnTo>
+                  <a:lnTo>
+                    <a:pt x="3652748" y="184580"/>
+                  </a:lnTo>
+                  <a:lnTo>
+                    <a:pt x="3581126" y="181292"/>
+                  </a:lnTo>
+                  <a:lnTo>
+                    <a:pt x="3509503" y="177993"/>
+                  </a:lnTo>
+                  <a:lnTo>
+                    <a:pt x="3437881" y="174680"/>
+                  </a:lnTo>
+                  <a:lnTo>
+                    <a:pt x="3366258" y="171355"/>
+                  </a:lnTo>
+                  <a:lnTo>
+                    <a:pt x="3294636" y="168018"/>
+                  </a:lnTo>
+                  <a:lnTo>
+                    <a:pt x="3223013" y="164668"/>
+                  </a:lnTo>
+                  <a:lnTo>
+                    <a:pt x="3151391" y="161305"/>
+                  </a:lnTo>
+                  <a:lnTo>
+                    <a:pt x="3079768" y="157929"/>
+                  </a:lnTo>
+                  <a:lnTo>
+                    <a:pt x="3008146" y="154541"/>
+                  </a:lnTo>
+                  <a:lnTo>
+                    <a:pt x="2936523" y="151140"/>
+                  </a:lnTo>
+                  <a:lnTo>
+                    <a:pt x="2864901" y="147726"/>
+                  </a:lnTo>
+                  <a:lnTo>
+                    <a:pt x="2793278" y="144299"/>
+                  </a:lnTo>
+                  <a:lnTo>
+                    <a:pt x="2721655" y="140859"/>
+                  </a:lnTo>
+                  <a:lnTo>
+                    <a:pt x="2650033" y="137405"/>
+                  </a:lnTo>
+                  <a:lnTo>
+                    <a:pt x="2578410" y="133939"/>
+                  </a:lnTo>
+                  <a:lnTo>
+                    <a:pt x="2506788" y="130460"/>
+                  </a:lnTo>
+                  <a:lnTo>
+                    <a:pt x="2435165" y="126967"/>
+                  </a:lnTo>
+                  <a:lnTo>
+                    <a:pt x="2363543" y="123461"/>
+                  </a:lnTo>
+                  <a:lnTo>
+                    <a:pt x="2291920" y="119942"/>
+                  </a:lnTo>
+                  <a:lnTo>
+                    <a:pt x="2220298" y="116410"/>
+                  </a:lnTo>
+                  <a:lnTo>
+                    <a:pt x="2148675" y="112864"/>
+                  </a:lnTo>
+                  <a:lnTo>
+                    <a:pt x="2077053" y="109305"/>
+                  </a:lnTo>
+                  <a:lnTo>
+                    <a:pt x="2005430" y="105732"/>
+                  </a:lnTo>
+                  <a:lnTo>
+                    <a:pt x="1933808" y="102146"/>
+                  </a:lnTo>
+                  <a:lnTo>
+                    <a:pt x="1862185" y="98546"/>
+                  </a:lnTo>
+                  <a:lnTo>
+                    <a:pt x="1790563" y="94932"/>
+                  </a:lnTo>
+                  <a:lnTo>
+                    <a:pt x="1718940" y="91305"/>
+                  </a:lnTo>
+                  <a:lnTo>
+                    <a:pt x="1647318" y="87664"/>
+                  </a:lnTo>
+                  <a:lnTo>
+                    <a:pt x="1575695" y="84009"/>
+                  </a:lnTo>
+                  <a:lnTo>
+                    <a:pt x="1504073" y="80340"/>
+                  </a:lnTo>
+                  <a:lnTo>
+                    <a:pt x="1432450" y="76657"/>
+                  </a:lnTo>
+                  <a:lnTo>
+                    <a:pt x="1360827" y="72961"/>
+                  </a:lnTo>
+                  <a:lnTo>
+                    <a:pt x="1289205" y="69250"/>
+                  </a:lnTo>
+                  <a:lnTo>
+                    <a:pt x="1217582" y="65525"/>
+                  </a:lnTo>
+                  <a:lnTo>
+                    <a:pt x="1145960" y="61787"/>
+                  </a:lnTo>
+                  <a:lnTo>
+                    <a:pt x="1074337" y="58034"/>
+                  </a:lnTo>
+                  <a:lnTo>
+                    <a:pt x="1002715" y="54266"/>
+                  </a:lnTo>
+                  <a:lnTo>
+                    <a:pt x="931092" y="50485"/>
+                  </a:lnTo>
+                  <a:lnTo>
+                    <a:pt x="859470" y="46689"/>
+                  </a:lnTo>
+                  <a:lnTo>
+                    <a:pt x="787847" y="42879"/>
+                  </a:lnTo>
+                  <a:lnTo>
+                    <a:pt x="716225" y="39054"/>
+                  </a:lnTo>
+                  <a:lnTo>
+                    <a:pt x="644602" y="35215"/>
+                  </a:lnTo>
+                  <a:lnTo>
+                    <a:pt x="572980" y="31361"/>
+                  </a:lnTo>
+                  <a:lnTo>
+                    <a:pt x="501357" y="27492"/>
+                  </a:lnTo>
+                  <a:lnTo>
+                    <a:pt x="429735" y="23609"/>
+                  </a:lnTo>
+                  <a:lnTo>
+                    <a:pt x="358112" y="19711"/>
+                  </a:lnTo>
+                  <a:lnTo>
+                    <a:pt x="286490" y="15799"/>
+                  </a:lnTo>
+                  <a:lnTo>
+                    <a:pt x="214867" y="11871"/>
+                  </a:lnTo>
+                  <a:lnTo>
+                    <a:pt x="143245" y="7929"/>
+                  </a:lnTo>
+                  <a:lnTo>
+                    <a:pt x="71622" y="3972"/>
                   </a:lnTo>
                   <a:lnTo>
                     <a:pt x="0" y="0"/>
@@ -3936,228 +3936,228 @@
           </p:nvSpPr>
           <p:spPr>
             <a:xfrm>
-              <a:off x="3241908" y="2073503"/>
-              <a:ext cx="5020770" cy="3311761"/>
+              <a:off x="3200029" y="2073503"/>
+              <a:ext cx="5062649" cy="3302778"/>
             </a:xfrm>
             <a:custGeom>
               <a:avLst/>
               <a:pathLst>
-                <a:path w="5020770" h="3311761">
+                <a:path w="5062649" h="3302778">
                   <a:moveTo>
                     <a:pt x="0" y="0"/>
                   </a:moveTo>
                   <a:lnTo>
-                    <a:pt x="7194" y="15276"/>
-                  </a:lnTo>
-                  <a:lnTo>
-                    <a:pt x="78816" y="160977"/>
-                  </a:lnTo>
-                  <a:lnTo>
-                    <a:pt x="150439" y="300558"/>
-                  </a:lnTo>
-                  <a:lnTo>
-                    <a:pt x="222061" y="434275"/>
-                  </a:lnTo>
-                  <a:lnTo>
-                    <a:pt x="293684" y="562375"/>
-                  </a:lnTo>
-                  <a:lnTo>
-                    <a:pt x="365306" y="685094"/>
-                  </a:lnTo>
-                  <a:lnTo>
-                    <a:pt x="436929" y="802657"/>
-                  </a:lnTo>
-                  <a:lnTo>
-                    <a:pt x="508551" y="915283"/>
-                  </a:lnTo>
-                  <a:lnTo>
-                    <a:pt x="580174" y="1023177"/>
-                  </a:lnTo>
-                  <a:lnTo>
-                    <a:pt x="651796" y="1126539"/>
-                  </a:lnTo>
-                  <a:lnTo>
-                    <a:pt x="723419" y="1225558"/>
-                  </a:lnTo>
-                  <a:lnTo>
-                    <a:pt x="795041" y="1320419"/>
-                  </a:lnTo>
-                  <a:lnTo>
-                    <a:pt x="866664" y="1411294"/>
-                  </a:lnTo>
-                  <a:lnTo>
-                    <a:pt x="938286" y="1498352"/>
-                  </a:lnTo>
-                  <a:lnTo>
-                    <a:pt x="1009909" y="1581753"/>
-                  </a:lnTo>
-                  <a:lnTo>
-                    <a:pt x="1081532" y="1661651"/>
-                  </a:lnTo>
-                  <a:lnTo>
-                    <a:pt x="1153154" y="1738192"/>
-                  </a:lnTo>
-                  <a:lnTo>
-                    <a:pt x="1224777" y="1811518"/>
-                  </a:lnTo>
-                  <a:lnTo>
-                    <a:pt x="1296399" y="1881764"/>
-                  </a:lnTo>
-                  <a:lnTo>
-                    <a:pt x="1368022" y="1949059"/>
-                  </a:lnTo>
-                  <a:lnTo>
-                    <a:pt x="1439644" y="2013527"/>
-                  </a:lnTo>
-                  <a:lnTo>
-                    <a:pt x="1511267" y="2075287"/>
-                  </a:lnTo>
-                  <a:lnTo>
-                    <a:pt x="1582889" y="2134452"/>
-                  </a:lnTo>
-                  <a:lnTo>
-                    <a:pt x="1654512" y="2191132"/>
-                  </a:lnTo>
-                  <a:lnTo>
-                    <a:pt x="1726134" y="2245432"/>
-                  </a:lnTo>
-                  <a:lnTo>
-                    <a:pt x="1797757" y="2297450"/>
-                  </a:lnTo>
-                  <a:lnTo>
-                    <a:pt x="1869379" y="2347283"/>
-                  </a:lnTo>
-                  <a:lnTo>
-                    <a:pt x="1941002" y="2395023"/>
-                  </a:lnTo>
-                  <a:lnTo>
-                    <a:pt x="2012624" y="2440757"/>
-                  </a:lnTo>
-                  <a:lnTo>
-                    <a:pt x="2084247" y="2484570"/>
-                  </a:lnTo>
-                  <a:lnTo>
-                    <a:pt x="2155869" y="2526543"/>
-                  </a:lnTo>
-                  <a:lnTo>
-                    <a:pt x="2227492" y="2566752"/>
-                  </a:lnTo>
-                  <a:lnTo>
-                    <a:pt x="2299114" y="2605273"/>
-                  </a:lnTo>
-                  <a:lnTo>
-                    <a:pt x="2370737" y="2642175"/>
-                  </a:lnTo>
-                  <a:lnTo>
-                    <a:pt x="2442360" y="2677527"/>
-                  </a:lnTo>
-                  <a:lnTo>
-                    <a:pt x="2513982" y="2711394"/>
-                  </a:lnTo>
-                  <a:lnTo>
-                    <a:pt x="2585605" y="2743839"/>
-                  </a:lnTo>
-                  <a:lnTo>
-                    <a:pt x="2657227" y="2774920"/>
-                  </a:lnTo>
-                  <a:lnTo>
-                    <a:pt x="2728850" y="2804696"/>
-                  </a:lnTo>
-                  <a:lnTo>
-                    <a:pt x="2800472" y="2833221"/>
-                  </a:lnTo>
-                  <a:lnTo>
-                    <a:pt x="2872095" y="2860548"/>
-                  </a:lnTo>
-                  <a:lnTo>
-                    <a:pt x="2943717" y="2886727"/>
-                  </a:lnTo>
-                  <a:lnTo>
-                    <a:pt x="3015340" y="2911806"/>
-                  </a:lnTo>
-                  <a:lnTo>
-                    <a:pt x="3086962" y="2935832"/>
-                  </a:lnTo>
-                  <a:lnTo>
-                    <a:pt x="3158585" y="2958848"/>
-                  </a:lnTo>
-                  <a:lnTo>
-                    <a:pt x="3230207" y="2980898"/>
-                  </a:lnTo>
-                  <a:lnTo>
-                    <a:pt x="3301830" y="3002021"/>
-                  </a:lnTo>
-                  <a:lnTo>
-                    <a:pt x="3373452" y="3022257"/>
-                  </a:lnTo>
-                  <a:lnTo>
-                    <a:pt x="3445075" y="3041643"/>
-                  </a:lnTo>
-                  <a:lnTo>
-                    <a:pt x="3516697" y="3060214"/>
-                  </a:lnTo>
-                  <a:lnTo>
-                    <a:pt x="3588320" y="3078006"/>
-                  </a:lnTo>
-                  <a:lnTo>
-                    <a:pt x="3659942" y="3095050"/>
-                  </a:lnTo>
-                  <a:lnTo>
-                    <a:pt x="3731565" y="3111378"/>
-                  </a:lnTo>
-                  <a:lnTo>
-                    <a:pt x="3803188" y="3127020"/>
-                  </a:lnTo>
-                  <a:lnTo>
-                    <a:pt x="3874810" y="3142005"/>
-                  </a:lnTo>
-                  <a:lnTo>
-                    <a:pt x="3946433" y="3156361"/>
-                  </a:lnTo>
-                  <a:lnTo>
-                    <a:pt x="4018055" y="3170113"/>
-                  </a:lnTo>
-                  <a:lnTo>
-                    <a:pt x="4089678" y="3183288"/>
-                  </a:lnTo>
-                  <a:lnTo>
-                    <a:pt x="4161300" y="3195910"/>
-                  </a:lnTo>
-                  <a:lnTo>
-                    <a:pt x="4232923" y="3208001"/>
-                  </a:lnTo>
-                  <a:lnTo>
-                    <a:pt x="4304545" y="3219584"/>
-                  </a:lnTo>
-                  <a:lnTo>
-                    <a:pt x="4376168" y="3230681"/>
-                  </a:lnTo>
-                  <a:lnTo>
-                    <a:pt x="4447790" y="3241312"/>
-                  </a:lnTo>
-                  <a:lnTo>
-                    <a:pt x="4519413" y="3251496"/>
-                  </a:lnTo>
-                  <a:lnTo>
-                    <a:pt x="4591035" y="3261252"/>
-                  </a:lnTo>
-                  <a:lnTo>
-                    <a:pt x="4662658" y="3270598"/>
-                  </a:lnTo>
-                  <a:lnTo>
-                    <a:pt x="4734280" y="3279552"/>
-                  </a:lnTo>
-                  <a:lnTo>
-                    <a:pt x="4805903" y="3288130"/>
-                  </a:lnTo>
-                  <a:lnTo>
-                    <a:pt x="4877525" y="3296347"/>
-                  </a:lnTo>
-                  <a:lnTo>
-                    <a:pt x="4949148" y="3304219"/>
-                  </a:lnTo>
-                  <a:lnTo>
-                    <a:pt x="5020770" y="3311761"/>
+                    <a:pt x="49072" y="99083"/>
+                  </a:lnTo>
+                  <a:lnTo>
+                    <a:pt x="120695" y="237770"/>
+                  </a:lnTo>
+                  <a:lnTo>
+                    <a:pt x="192317" y="370774"/>
+                  </a:lnTo>
+                  <a:lnTo>
+                    <a:pt x="263940" y="498329"/>
+                  </a:lnTo>
+                  <a:lnTo>
+                    <a:pt x="335563" y="620657"/>
+                  </a:lnTo>
+                  <a:lnTo>
+                    <a:pt x="407185" y="737973"/>
+                  </a:lnTo>
+                  <a:lnTo>
+                    <a:pt x="478808" y="850482"/>
+                  </a:lnTo>
+                  <a:lnTo>
+                    <a:pt x="550430" y="958380"/>
+                  </a:lnTo>
+                  <a:lnTo>
+                    <a:pt x="622053" y="1061858"/>
+                  </a:lnTo>
+                  <a:lnTo>
+                    <a:pt x="693675" y="1161095"/>
+                  </a:lnTo>
+                  <a:lnTo>
+                    <a:pt x="765298" y="1256266"/>
+                  </a:lnTo>
+                  <a:lnTo>
+                    <a:pt x="836920" y="1347538"/>
+                  </a:lnTo>
+                  <a:lnTo>
+                    <a:pt x="908543" y="1435069"/>
+                  </a:lnTo>
+                  <a:lnTo>
+                    <a:pt x="980165" y="1519014"/>
+                  </a:lnTo>
+                  <a:lnTo>
+                    <a:pt x="1051788" y="1599519"/>
+                  </a:lnTo>
+                  <a:lnTo>
+                    <a:pt x="1123410" y="1676726"/>
+                  </a:lnTo>
+                  <a:lnTo>
+                    <a:pt x="1195033" y="1750769"/>
+                  </a:lnTo>
+                  <a:lnTo>
+                    <a:pt x="1266655" y="1821778"/>
+                  </a:lnTo>
+                  <a:lnTo>
+                    <a:pt x="1338278" y="1889878"/>
+                  </a:lnTo>
+                  <a:lnTo>
+                    <a:pt x="1409900" y="1955187"/>
+                  </a:lnTo>
+                  <a:lnTo>
+                    <a:pt x="1481523" y="2017820"/>
+                  </a:lnTo>
+                  <a:lnTo>
+                    <a:pt x="1553145" y="2077887"/>
+                  </a:lnTo>
+                  <a:lnTo>
+                    <a:pt x="1624768" y="2135492"/>
+                  </a:lnTo>
+                  <a:lnTo>
+                    <a:pt x="1696391" y="2190737"/>
+                  </a:lnTo>
+                  <a:lnTo>
+                    <a:pt x="1768013" y="2243718"/>
+                  </a:lnTo>
+                  <a:lnTo>
+                    <a:pt x="1839636" y="2294529"/>
+                  </a:lnTo>
+                  <a:lnTo>
+                    <a:pt x="1911258" y="2343257"/>
+                  </a:lnTo>
+                  <a:lnTo>
+                    <a:pt x="1982881" y="2389989"/>
+                  </a:lnTo>
+                  <a:lnTo>
+                    <a:pt x="2054503" y="2434806"/>
+                  </a:lnTo>
+                  <a:lnTo>
+                    <a:pt x="2126126" y="2477786"/>
+                  </a:lnTo>
+                  <a:lnTo>
+                    <a:pt x="2197748" y="2519006"/>
+                  </a:lnTo>
+                  <a:lnTo>
+                    <a:pt x="2269371" y="2558536"/>
+                  </a:lnTo>
+                  <a:lnTo>
+                    <a:pt x="2340993" y="2596447"/>
+                  </a:lnTo>
+                  <a:lnTo>
+                    <a:pt x="2412616" y="2632804"/>
+                  </a:lnTo>
+                  <a:lnTo>
+                    <a:pt x="2484238" y="2667672"/>
+                  </a:lnTo>
+                  <a:lnTo>
+                    <a:pt x="2555861" y="2701111"/>
+                  </a:lnTo>
+                  <a:lnTo>
+                    <a:pt x="2627483" y="2733179"/>
+                  </a:lnTo>
+                  <a:lnTo>
+                    <a:pt x="2699106" y="2763934"/>
+                  </a:lnTo>
+                  <a:lnTo>
+                    <a:pt x="2770728" y="2793428"/>
+                  </a:lnTo>
+                  <a:lnTo>
+                    <a:pt x="2842351" y="2821714"/>
+                  </a:lnTo>
+                  <a:lnTo>
+                    <a:pt x="2913973" y="2848841"/>
+                  </a:lnTo>
+                  <a:lnTo>
+                    <a:pt x="2985596" y="2874857"/>
+                  </a:lnTo>
+                  <a:lnTo>
+                    <a:pt x="3057219" y="2899806"/>
+                  </a:lnTo>
+                  <a:lnTo>
+                    <a:pt x="3128841" y="2923733"/>
+                  </a:lnTo>
+                  <a:lnTo>
+                    <a:pt x="3200464" y="2946680"/>
+                  </a:lnTo>
+                  <a:lnTo>
+                    <a:pt x="3272086" y="2968686"/>
+                  </a:lnTo>
+                  <a:lnTo>
+                    <a:pt x="3343709" y="2989791"/>
+                  </a:lnTo>
+                  <a:lnTo>
+                    <a:pt x="3415331" y="3010031"/>
+                  </a:lnTo>
+                  <a:lnTo>
+                    <a:pt x="3486954" y="3029441"/>
+                  </a:lnTo>
+                  <a:lnTo>
+                    <a:pt x="3558576" y="3048057"/>
+                  </a:lnTo>
+                  <a:lnTo>
+                    <a:pt x="3630199" y="3065909"/>
+                  </a:lnTo>
+                  <a:lnTo>
+                    <a:pt x="3701821" y="3083030"/>
+                  </a:lnTo>
+                  <a:lnTo>
+                    <a:pt x="3773444" y="3099450"/>
+                  </a:lnTo>
+                  <a:lnTo>
+                    <a:pt x="3845066" y="3115196"/>
+                  </a:lnTo>
+                  <a:lnTo>
+                    <a:pt x="3916689" y="3130298"/>
+                  </a:lnTo>
+                  <a:lnTo>
+                    <a:pt x="3988311" y="3144780"/>
+                  </a:lnTo>
+                  <a:lnTo>
+                    <a:pt x="4059934" y="3158669"/>
+                  </a:lnTo>
+                  <a:lnTo>
+                    <a:pt x="4131556" y="3171990"/>
+                  </a:lnTo>
+                  <a:lnTo>
+                    <a:pt x="4203179" y="3184764"/>
+                  </a:lnTo>
+                  <a:lnTo>
+                    <a:pt x="4274801" y="3197015"/>
+                  </a:lnTo>
+                  <a:lnTo>
+                    <a:pt x="4346424" y="3208764"/>
+                  </a:lnTo>
+                  <a:lnTo>
+                    <a:pt x="4418047" y="3220031"/>
+                  </a:lnTo>
+                  <a:lnTo>
+                    <a:pt x="4489669" y="3230837"/>
+                  </a:lnTo>
+                  <a:lnTo>
+                    <a:pt x="4561292" y="3241200"/>
+                  </a:lnTo>
+                  <a:lnTo>
+                    <a:pt x="4632914" y="3251138"/>
+                  </a:lnTo>
+                  <a:lnTo>
+                    <a:pt x="4704537" y="3260669"/>
+                  </a:lnTo>
+                  <a:lnTo>
+                    <a:pt x="4776159" y="3269810"/>
+                  </a:lnTo>
+                  <a:lnTo>
+                    <a:pt x="4847782" y="3278576"/>
+                  </a:lnTo>
+                  <a:lnTo>
+                    <a:pt x="4919404" y="3286983"/>
+                  </a:lnTo>
+                  <a:lnTo>
+                    <a:pt x="4991027" y="3295045"/>
+                  </a:lnTo>
+                  <a:lnTo>
+                    <a:pt x="5062649" y="3302778"/>
                   </a:lnTo>
                 </a:path>
               </a:pathLst>
@@ -4229,7 +4229,7 @@
           </p:nvSpPr>
           <p:spPr>
             <a:xfrm>
-              <a:off x="5636831" y="2073503"/>
+              <a:off x="5656410" y="2073503"/>
               <a:ext cx="0" cy="3649639"/>
             </a:xfrm>
             <a:custGeom>
@@ -4272,7 +4272,7 @@
           </p:nvSpPr>
           <p:spPr>
             <a:xfrm>
-              <a:off x="4328179" y="2073503"/>
+              <a:off x="4335733" y="2073503"/>
               <a:ext cx="0" cy="3649639"/>
             </a:xfrm>
             <a:custGeom>
@@ -4315,7 +4315,7 @@
           </p:nvSpPr>
           <p:spPr>
             <a:xfrm>
-              <a:off x="6683624" y="2073503"/>
+              <a:off x="6684598" y="2073503"/>
               <a:ext cx="0" cy="3649639"/>
             </a:xfrm>
             <a:custGeom>
@@ -4588,7 +4588,7 @@
           </p:nvSpPr>
           <p:spPr>
             <a:xfrm>
-              <a:off x="2970385" y="5785772"/>
+              <a:off x="2971977" y="5785772"/>
               <a:ext cx="161574" cy="80101"/>
             </a:xfrm>
             <a:prstGeom prst="rect">
@@ -4634,7 +4634,7 @@
           </p:nvSpPr>
           <p:spPr>
             <a:xfrm>
-              <a:off x="5501440" y="5785772"/>
+              <a:off x="5499574" y="5785772"/>
               <a:ext cx="62179" cy="80101"/>
             </a:xfrm>
             <a:prstGeom prst="rect">
@@ -4680,7 +4680,7 @@
           </p:nvSpPr>
           <p:spPr>
             <a:xfrm>
-              <a:off x="7951708" y="5785772"/>
+              <a:off x="7946384" y="5785772"/>
               <a:ext cx="124358" cy="80101"/>
             </a:xfrm>
             <a:prstGeom prst="rect">
@@ -4851,7 +4851,7 @@
                   <a:latin typeface="Helvetica"/>
                   <a:cs typeface="Helvetica"/>
                 </a:rPr>
-                <a:t>subHR per 10 mL/min decline: 1.81 (1.07-3.08), p_Bonf = 0.165 (n = 6)  |  per IQR decline (Δ = 23.7): 4.10 (1.17-14.38)  |  IQR: [-12.1, 11.6]</a:t>
+                <a:t>subHR per 10 mL/min decline: 1.78 (1.05-3.02), p_Bonf = 0.187 (n = 6)  |  per IQR decline (Δ = 23.7): 3.94 (1.13-13.74)  |  IQR: [-12.1, 11.6]</a:t>
               </a:r>
             </a:p>
           </p:txBody>
